--- a/acceptance/samples/deck-B-暗色调度台.pptx
+++ b/acceptance/samples/deck-B-暗色调度台.pptx
@@ -4543,8 +4543,8 @@
         </p:nvSpPr>
         <p:spPr>
           <a:xfrm>
-            <a:off x="7848600" y="2362200"/>
-            <a:ext cx="3810000" cy="1066800"/>
+            <a:off x="7848600" y="2324100"/>
+            <a:ext cx="3810000" cy="952500"/>
           </a:xfrm>
           <a:prstGeom prst="rect">
             <a:avLst/>
@@ -4560,11 +4560,11 @@
           <a:p>
             <a:pPr algn="l">
               <a:lnSpc>
-                <a:spcPts val="7290"/>
+                <a:spcPts val="6075"/>
               </a:lnSpc>
             </a:pPr>
             <a:r>
-              <a:rPr sz="5400" b="1" i="0">
+              <a:rPr sz="4500" b="1" i="0">
                 <a:solidFill>
                   <a:srgbClr val="5AC8FA"/>
                 </a:solidFill>
@@ -5252,14 +5252,14 @@
       </p:sp>
       <p:sp>
         <p:nvSpPr>
-          <p:cNvPr id="10" name="d04_note"/>
+          <p:cNvPr id="10" name="d04_note_a"/>
           <p:cNvSpPr txBox="1"/>
           <p:nvPr/>
         </p:nvSpPr>
         <p:spPr>
           <a:xfrm>
             <a:off x="6096000" y="2819400"/>
-            <a:ext cx="5334000" cy="1524000"/>
+            <a:ext cx="5334000" cy="762000"/>
           </a:xfrm>
           <a:prstGeom prst="rect">
             <a:avLst/>
@@ -5330,6 +5330,30 @@
               <a:t>它跟着用户在线时段走。</a:t>
             </a:r>
           </a:p>
+        </p:txBody>
+      </p:sp>
+      <p:sp>
+        <p:nvSpPr>
+          <p:cNvPr id="11" name="d04_note_b"/>
+          <p:cNvSpPr txBox="1"/>
+          <p:nvPr/>
+        </p:nvSpPr>
+        <p:spPr>
+          <a:xfrm>
+            <a:off x="6096000" y="3810000"/>
+            <a:ext cx="5334000" cy="762000"/>
+          </a:xfrm>
+          <a:prstGeom prst="rect">
+            <a:avLst/>
+          </a:prstGeom>
+          <a:noFill/>
+          <a:effectLst/>
+        </p:spPr>
+        <p:txBody>
+          <a:bodyPr wrap="square" anchor="t" lIns="0" rIns="0" tIns="0" bIns="0">
+            <a:spAutoFit/>
+          </a:bodyPr>
+          <a:lstStyle/>
           <a:p>
             <a:pPr algn="l">
               <a:lnSpc>
@@ -5345,7 +5369,7 @@
                 <a:ea typeface="思源黑体 SC"/>
                 <a:cs typeface="思源黑体 SC"/>
               </a:rPr>
-              <a:t>能挪的只有离线批处理与训练窗口</a:t>
+              <a:t>能挪的只是离线批处理与训练窗口</a:t>
             </a:r>
             <a:r>
               <a:rPr sz="1200" b="0" i="0">
@@ -5381,7 +5405,7 @@
       </p:sp>
       <p:sp>
         <p:nvSpPr>
-          <p:cNvPr id="11" name="src"/>
+          <p:cNvPr id="12" name="src"/>
           <p:cNvSpPr txBox="1"/>
           <p:nvPr/>
         </p:nvSpPr>
